--- a/public/fun/cards/finance/finance-27.pptx
+++ b/public/fun/cards/finance/finance-27.pptx
@@ -3085,7 +3085,7 @@
     <p:bg>
       <p:bgPr>
         <a:solidFill>
-          <a:srgbClr val="EFF5FA"/>
+          <a:srgbClr val="0E1116"/>
         </a:solidFill>
         <a:effectLst/>
       </p:bgPr>
@@ -3099,23 +3099,23 @@
       <p:grpSpPr/>
       <p:sp>
         <p:nvSpPr>
-          <p:cNvPr id="2" name="Rectangle 1"/>
+          <p:cNvPr id="2" name="Oval 1"/>
           <p:cNvSpPr/>
           <p:nvPr/>
         </p:nvSpPr>
         <p:spPr>
           <a:xfrm>
-            <a:off x="93600" y="93600"/>
-            <a:ext cx="3052800" cy="1612800"/>
+            <a:off x="1591200" y="208800"/>
+            <a:ext cx="57600" cy="57600"/>
           </a:xfrm>
-          <a:prstGeom prst="rect">
+          <a:prstGeom prst="ellipse">
             <a:avLst/>
           </a:prstGeom>
-          <a:noFill/>
-          <a:ln w="10800">
-            <a:solidFill>
-              <a:srgbClr val="275A86"/>
-            </a:solidFill>
+          <a:solidFill>
+            <a:srgbClr val="FF2E93"/>
+          </a:solidFill>
+          <a:ln>
+            <a:noFill/>
           </a:ln>
         </p:spPr>
         <p:txBody>
@@ -3128,43 +3128,14 @@
       </p:sp>
       <p:sp>
         <p:nvSpPr>
-          <p:cNvPr id="3" name="Rectangle 2"/>
-          <p:cNvSpPr/>
+          <p:cNvPr id="3" name="텍스트"/>
+          <p:cNvSpPr txBox="1"/>
           <p:nvPr/>
         </p:nvSpPr>
         <p:spPr>
           <a:xfrm>
-            <a:off x="144000" y="144000"/>
-            <a:ext cx="2952000" cy="1512000"/>
-          </a:xfrm>
-          <a:prstGeom prst="rect">
-            <a:avLst/>
-          </a:prstGeom>
-          <a:noFill/>
-          <a:ln w="5400">
-            <a:solidFill>
-              <a:srgbClr val="DDEBF7"/>
-            </a:solidFill>
-          </a:ln>
-        </p:spPr>
-        <p:txBody>
-          <a:bodyPr rtlCol="0" anchor="ctr"/>
-          <a:lstStyle/>
-          <a:p>
-            <a:pPr algn="ctr"/>
-          </a:p>
-        </p:txBody>
-      </p:sp>
-      <p:sp>
-        <p:nvSpPr>
-          <p:cNvPr id="4" name="텍스트"/>
-          <p:cNvSpPr txBox="1"/>
-          <p:nvPr/>
-        </p:nvSpPr>
-        <p:spPr>
-          <a:xfrm>
-            <a:off x="360000" y="280800"/>
-            <a:ext cx="2520000" cy="100800"/>
+            <a:off x="360000" y="468000"/>
+            <a:ext cx="2520000" cy="360000"/>
           </a:xfrm>
           <a:prstGeom prst="rect">
             <a:avLst/>
@@ -3179,32 +3150,32 @@
           <a:p>
             <a:pPr algn="ctr">
               <a:lnSpc>
-                <a:spcPts val="1015"/>
+                <a:spcPts val="3190"/>
               </a:lnSpc>
             </a:pPr>
             <a:r>
-              <a:rPr sz="700" b="1" spc="400">
+              <a:rPr sz="2200" b="1">
                 <a:solidFill>
-                  <a:srgbClr val="5F7180"/>
+                  <a:srgbClr val="FFFFFF"/>
                 </a:solidFill>
                 <a:latin typeface="맑은 고딕"/>
                 <a:ea typeface="맑은 고딕"/>
               </a:rPr>
-              <a:t>회사 · 사무소 이름</a:t>
-            </a:r>
-          </a:p>
-        </p:txBody>
-      </p:sp>
-      <p:sp>
-        <p:nvSpPr>
-          <p:cNvPr id="5" name="텍스트"/>
+              <a:t>하지안</a:t>
+            </a:r>
+          </a:p>
+        </p:txBody>
+      </p:sp>
+      <p:sp>
+        <p:nvSpPr>
+          <p:cNvPr id="4" name="텍스트"/>
           <p:cNvSpPr txBox="1"/>
           <p:nvPr/>
         </p:nvSpPr>
         <p:spPr>
           <a:xfrm>
-            <a:off x="360000" y="468000"/>
-            <a:ext cx="2520000" cy="313692"/>
+            <a:off x="360000" y="878400"/>
+            <a:ext cx="2520000" cy="171451"/>
           </a:xfrm>
           <a:prstGeom prst="rect">
             <a:avLst/>
@@ -3219,19 +3190,48 @@
           <a:p>
             <a:pPr algn="ctr">
               <a:lnSpc>
-                <a:spcPts val="2755"/>
+                <a:spcPts val="1305"/>
               </a:lnSpc>
             </a:pPr>
             <a:r>
-              <a:rPr sz="1900" b="1" spc="50">
+              <a:rPr sz="900" b="0">
                 <a:solidFill>
-                  <a:srgbClr val="122A3F"/>
+                  <a:srgbClr val="A3A9B5"/>
                 </a:solidFill>
                 <a:latin typeface="맑은 고딕"/>
                 <a:ea typeface="맑은 고딕"/>
               </a:rPr>
-              <a:t>하지안</a:t>
-            </a:r>
+              <a:t>회계사</a:t>
+            </a:r>
+          </a:p>
+        </p:txBody>
+      </p:sp>
+      <p:sp>
+        <p:nvSpPr>
+          <p:cNvPr id="5" name="Rectangle 4"/>
+          <p:cNvSpPr/>
+          <p:nvPr/>
+        </p:nvSpPr>
+        <p:spPr>
+          <a:xfrm>
+            <a:off x="1530000" y="1137600"/>
+            <a:ext cx="180000" cy="14400"/>
+          </a:xfrm>
+          <a:prstGeom prst="rect">
+            <a:avLst/>
+          </a:prstGeom>
+          <a:solidFill>
+            <a:srgbClr val="FF2E93"/>
+          </a:solidFill>
+          <a:ln>
+            <a:noFill/>
+          </a:ln>
+        </p:spPr>
+        <p:txBody>
+          <a:bodyPr rtlCol="0" anchor="ctr"/>
+          <a:lstStyle/>
+          <a:p>
+            <a:pPr algn="ctr"/>
           </a:p>
         </p:txBody>
       </p:sp>
@@ -3243,8 +3243,8 @@
         </p:nvSpPr>
         <p:spPr>
           <a:xfrm>
-            <a:off x="360000" y="784800"/>
-            <a:ext cx="2520000" cy="122400"/>
+            <a:off x="360000" y="1267200"/>
+            <a:ext cx="2520000" cy="133351"/>
           </a:xfrm>
           <a:prstGeom prst="rect">
             <a:avLst/>
@@ -3259,61 +3259,32 @@
           <a:p>
             <a:pPr algn="ctr">
               <a:lnSpc>
-                <a:spcPts val="1232"/>
+                <a:spcPts val="1015"/>
               </a:lnSpc>
             </a:pPr>
             <a:r>
-              <a:rPr sz="850" b="1">
+              <a:rPr sz="700" b="0">
                 <a:solidFill>
-                  <a:srgbClr val="275A86"/>
+                  <a:srgbClr val="FFFFFF"/>
                 </a:solidFill>
                 <a:latin typeface="맑은 고딕"/>
                 <a:ea typeface="맑은 고딕"/>
               </a:rPr>
-              <a:t>회계사</a:t>
-            </a:r>
-          </a:p>
-        </p:txBody>
-      </p:sp>
-      <p:sp>
-        <p:nvSpPr>
-          <p:cNvPr id="7" name="Rectangle 6"/>
-          <p:cNvSpPr/>
+              <a:t>010-1234-5678      name@example.com</a:t>
+            </a:r>
+          </a:p>
+        </p:txBody>
+      </p:sp>
+      <p:sp>
+        <p:nvSpPr>
+          <p:cNvPr id="7" name="텍스트"/>
+          <p:cNvSpPr txBox="1"/>
           <p:nvPr/>
         </p:nvSpPr>
         <p:spPr>
           <a:xfrm>
-            <a:off x="1530000" y="993600"/>
-            <a:ext cx="180000" cy="10800"/>
-          </a:xfrm>
-          <a:prstGeom prst="rect">
-            <a:avLst/>
-          </a:prstGeom>
-          <a:solidFill>
-            <a:srgbClr val="275A86"/>
-          </a:solidFill>
-          <a:ln>
-            <a:noFill/>
-          </a:ln>
-        </p:spPr>
-        <p:txBody>
-          <a:bodyPr rtlCol="0" anchor="ctr"/>
-          <a:lstStyle/>
-          <a:p>
-            <a:pPr algn="ctr"/>
-          </a:p>
-        </p:txBody>
-      </p:sp>
-      <p:sp>
-        <p:nvSpPr>
-          <p:cNvPr id="8" name="텍스트"/>
-          <p:cNvSpPr txBox="1"/>
-          <p:nvPr/>
-        </p:nvSpPr>
-        <p:spPr>
-          <a:xfrm>
-            <a:off x="360000" y="1087200"/>
-            <a:ext cx="2520000" cy="108000"/>
+            <a:off x="360000" y="1425600"/>
+            <a:ext cx="2520000" cy="133351"/>
           </a:xfrm>
           <a:prstGeom prst="rect">
             <a:avLst/>
@@ -3328,32 +3299,32 @@
           <a:p>
             <a:pPr algn="ctr">
               <a:lnSpc>
-                <a:spcPts val="1087"/>
+                <a:spcPts val="1015"/>
               </a:lnSpc>
             </a:pPr>
             <a:r>
-              <a:rPr sz="750" b="0">
+              <a:rPr sz="700" b="0">
                 <a:solidFill>
-                  <a:srgbClr val="122A3F"/>
+                  <a:srgbClr val="A3A9B5"/>
                 </a:solidFill>
                 <a:latin typeface="맑은 고딕"/>
                 <a:ea typeface="맑은 고딕"/>
               </a:rPr>
-              <a:t>010-1234-5678</a:t>
-            </a:r>
-          </a:p>
-        </p:txBody>
-      </p:sp>
-      <p:sp>
-        <p:nvSpPr>
-          <p:cNvPr id="9" name="텍스트"/>
+              <a:t>주소를 입력해 주세요</a:t>
+            </a:r>
+          </a:p>
+        </p:txBody>
+      </p:sp>
+      <p:sp>
+        <p:nvSpPr>
+          <p:cNvPr id="8" name="텍스트"/>
           <p:cNvSpPr txBox="1"/>
           <p:nvPr/>
         </p:nvSpPr>
         <p:spPr>
           <a:xfrm>
-            <a:off x="360000" y="1209600"/>
-            <a:ext cx="2520000" cy="108000"/>
+            <a:off x="360000" y="1576800"/>
+            <a:ext cx="2520000" cy="104776"/>
           </a:xfrm>
           <a:prstGeom prst="rect">
             <a:avLst/>
@@ -3368,176 +3339,22 @@
           <a:p>
             <a:pPr algn="ctr">
               <a:lnSpc>
-                <a:spcPts val="1087"/>
+                <a:spcPts val="797"/>
               </a:lnSpc>
             </a:pPr>
             <a:r>
-              <a:rPr sz="750" b="0">
+              <a:rPr sz="550" b="1" spc="300">
                 <a:solidFill>
-                  <a:srgbClr val="122A3F"/>
+                  <a:srgbClr val="A3A9B5"/>
                 </a:solidFill>
                 <a:latin typeface="맑은 고딕"/>
                 <a:ea typeface="맑은 고딕"/>
               </a:rPr>
-              <a:t>name@example.com</a:t>
-            </a:r>
-          </a:p>
-        </p:txBody>
-      </p:sp>
-      <p:sp>
-        <p:nvSpPr>
-          <p:cNvPr id="10" name="텍스트"/>
-          <p:cNvSpPr txBox="1"/>
-          <p:nvPr/>
-        </p:nvSpPr>
-        <p:spPr>
-          <a:xfrm>
-            <a:off x="360000" y="1332000"/>
-            <a:ext cx="2520000" cy="108000"/>
-          </a:xfrm>
-          <a:prstGeom prst="rect">
-            <a:avLst/>
-          </a:prstGeom>
-          <a:noFill/>
-        </p:spPr>
-        <p:txBody>
-          <a:bodyPr wrap="square" lIns="0" rIns="0" tIns="0" bIns="0" anchor="t">
-            <a:spAutoFit/>
-          </a:bodyPr>
-          <a:lstStyle/>
-          <a:p>
-            <a:pPr algn="ctr">
-              <a:lnSpc>
-                <a:spcPts val="1015"/>
-              </a:lnSpc>
-            </a:pPr>
-            <a:r>
-              <a:rPr sz="700" b="0">
-                <a:solidFill>
-                  <a:srgbClr val="5F7180"/>
-                </a:solidFill>
-                <a:latin typeface="맑은 고딕"/>
-                <a:ea typeface="맑은 고딕"/>
-              </a:rPr>
-              <a:t>주소를 입력해 주세요</a:t>
-            </a:r>
-          </a:p>
-        </p:txBody>
-      </p:sp>
-      <p:sp>
-        <p:nvSpPr>
-          <p:cNvPr id="11" name="Rounded Rectangle 10"/>
-          <p:cNvSpPr/>
-          <p:nvPr/>
-        </p:nvSpPr>
-        <p:spPr>
-          <a:xfrm>
-            <a:off x="1570752" y="1556208"/>
-            <a:ext cx="27360" cy="49248"/>
-          </a:xfrm>
-          <a:prstGeom prst="roundRect">
-            <a:avLst>
-              <a:gd name="adj" fmla="val 10000"/>
-            </a:avLst>
-          </a:prstGeom>
-          <a:solidFill>
-            <a:srgbClr val="275A86"/>
-          </a:solidFill>
-          <a:ln>
-            <a:noFill/>
-          </a:ln>
-        </p:spPr>
-        <p:txBody>
-          <a:bodyPr rtlCol="0" anchor="ctr"/>
-          <a:lstStyle/>
-          <a:p>
-            <a:pPr algn="ctr"/>
-          </a:p>
-        </p:txBody>
-      </p:sp>
-      <p:sp>
-        <p:nvSpPr>
-          <p:cNvPr id="12" name="Rounded Rectangle 11"/>
-          <p:cNvSpPr/>
-          <p:nvPr/>
-        </p:nvSpPr>
-        <p:spPr>
-          <a:xfrm>
-            <a:off x="1606320" y="1528848"/>
-            <a:ext cx="27360" cy="76608"/>
-          </a:xfrm>
-          <a:prstGeom prst="roundRect">
-            <a:avLst>
-              <a:gd name="adj" fmla="val 10000"/>
-            </a:avLst>
-          </a:prstGeom>
-          <a:solidFill>
-            <a:srgbClr val="DDEBF7"/>
-          </a:solidFill>
-          <a:ln>
-            <a:noFill/>
-          </a:ln>
-        </p:spPr>
-        <p:txBody>
-          <a:bodyPr rtlCol="0" anchor="ctr"/>
-          <a:lstStyle/>
-          <a:p>
-            <a:pPr algn="ctr"/>
-          </a:p>
-        </p:txBody>
-      </p:sp>
-      <p:sp>
-        <p:nvSpPr>
-          <p:cNvPr id="13" name="Rounded Rectangle 12"/>
-          <p:cNvSpPr/>
-          <p:nvPr/>
-        </p:nvSpPr>
-        <p:spPr>
-          <a:xfrm>
-            <a:off x="1641888" y="1496016"/>
-            <a:ext cx="27360" cy="109440"/>
-          </a:xfrm>
-          <a:prstGeom prst="roundRect">
-            <a:avLst>
-              <a:gd name="adj" fmla="val 10000"/>
-            </a:avLst>
-          </a:prstGeom>
-          <a:solidFill>
-            <a:srgbClr val="275A86"/>
-          </a:solidFill>
-          <a:ln>
-            <a:noFill/>
-          </a:ln>
-        </p:spPr>
-        <p:txBody>
-          <a:bodyPr rtlCol="0" anchor="ctr"/>
-          <a:lstStyle/>
-          <a:p>
-            <a:pPr algn="ctr"/>
-          </a:p>
-        </p:txBody>
-      </p:sp>
-      <p:cxnSp>
-        <p:nvCxnSpPr>
-          <p:cNvPr id="14" name="Connector 13"/>
-          <p:cNvCxnSpPr/>
-          <p:nvPr/>
-        </p:nvCxnSpPr>
-        <p:spPr>
-          <a:xfrm>
-            <a:off x="1559808" y="1610928"/>
-            <a:ext cx="120384" cy="0"/>
-          </a:xfrm>
-          <a:prstGeom prst="line">
-            <a:avLst/>
-          </a:prstGeom>
-          <a:ln w="5472">
-            <a:solidFill>
-              <a:srgbClr val="DDEBF7"/>
-            </a:solidFill>
-          </a:ln>
-        </p:spPr>
-      </p:cxnSp>
+              <a:t>회사 · 사무소 이름</a:t>
+            </a:r>
+          </a:p>
+        </p:txBody>
+      </p:sp>
     </p:spTree>
   </p:cSld>
   <p:clrMapOvr>
@@ -3552,7 +3369,7 @@
     <p:bg>
       <p:bgPr>
         <a:solidFill>
-          <a:srgbClr val="497633"/>
+          <a:srgbClr val="FFFFFF"/>
         </a:solidFill>
         <a:effectLst/>
       </p:bgPr>
@@ -3572,16 +3389,45 @@
         </p:nvSpPr>
         <p:spPr>
           <a:xfrm>
-            <a:off x="108000" y="108000"/>
-            <a:ext cx="3024000" cy="1584000"/>
+            <a:off x="2088000" y="0"/>
+            <a:ext cx="1152000" cy="1800000"/>
           </a:xfrm>
           <a:prstGeom prst="rect">
+            <a:avLst/>
+          </a:prstGeom>
+          <a:solidFill>
+            <a:srgbClr val="FF2E93"/>
+          </a:solidFill>
+          <a:ln>
+            <a:noFill/>
+          </a:ln>
+        </p:spPr>
+        <p:txBody>
+          <a:bodyPr rtlCol="0" anchor="ctr"/>
+          <a:lstStyle/>
+          <a:p>
+            <a:pPr algn="ctr"/>
+          </a:p>
+        </p:txBody>
+      </p:sp>
+      <p:sp>
+        <p:nvSpPr>
+          <p:cNvPr id="3" name="Oval 2"/>
+          <p:cNvSpPr/>
+          <p:nvPr/>
+        </p:nvSpPr>
+        <p:spPr>
+          <a:xfrm>
+            <a:off x="2397600" y="633600"/>
+            <a:ext cx="532800" cy="532800"/>
+          </a:xfrm>
+          <a:prstGeom prst="ellipse">
             <a:avLst/>
           </a:prstGeom>
           <a:noFill/>
           <a:ln w="10800">
             <a:solidFill>
-              <a:srgbClr val="DCEED3"/>
+              <a:srgbClr val="FFFFFF"/>
             </a:solidFill>
           </a:ln>
         </p:spPr>
@@ -3595,14 +3441,14 @@
       </p:sp>
       <p:sp>
         <p:nvSpPr>
-          <p:cNvPr id="3" name="텍스트"/>
+          <p:cNvPr id="4" name="텍스트"/>
           <p:cNvSpPr txBox="1"/>
           <p:nvPr/>
         </p:nvSpPr>
         <p:spPr>
           <a:xfrm>
-            <a:off x="396000" y="504000"/>
-            <a:ext cx="2448000" cy="432000"/>
+            <a:off x="2304000" y="684000"/>
+            <a:ext cx="720000" cy="432000"/>
           </a:xfrm>
           <a:prstGeom prst="rect">
             <a:avLst/>
@@ -3617,82 +3463,32 @@
           <a:p>
             <a:pPr algn="ctr">
               <a:lnSpc>
-                <a:spcPts val="1739"/>
+                <a:spcPts val="4350"/>
               </a:lnSpc>
             </a:pPr>
             <a:r>
-              <a:rPr sz="1200" b="1">
+              <a:rPr sz="3000" b="1">
                 <a:solidFill>
                   <a:srgbClr val="FFFFFF"/>
                 </a:solidFill>
                 <a:latin typeface="맑은 고딕"/>
                 <a:ea typeface="맑은 고딕"/>
               </a:rPr>
-              <a:t>필요한 시점에 먼저 연락드립니다</a:t>
-            </a:r>
-          </a:p>
-        </p:txBody>
-      </p:sp>
-      <p:cxnSp>
-        <p:nvCxnSpPr>
-          <p:cNvPr id="4" name="Connector 3"/>
-          <p:cNvCxnSpPr/>
+              <a:t>회</a:t>
+            </a:r>
+          </a:p>
+        </p:txBody>
+      </p:sp>
+      <p:sp>
+        <p:nvSpPr>
+          <p:cNvPr id="5" name="텍스트"/>
+          <p:cNvSpPr txBox="1"/>
           <p:nvPr/>
-        </p:nvCxnSpPr>
+        </p:nvSpPr>
         <p:spPr>
           <a:xfrm>
-            <a:off x="1260000" y="1080000"/>
-            <a:ext cx="684000" cy="0"/>
-          </a:xfrm>
-          <a:prstGeom prst="line">
-            <a:avLst/>
-          </a:prstGeom>
-          <a:ln w="7200">
-            <a:solidFill>
-              <a:srgbClr val="DCEED3"/>
-            </a:solidFill>
-          </a:ln>
-        </p:spPr>
-      </p:cxnSp>
-      <p:sp>
-        <p:nvSpPr>
-          <p:cNvPr id="5" name="Oval 4"/>
-          <p:cNvSpPr/>
-          <p:nvPr/>
-        </p:nvSpPr>
-        <p:spPr>
-          <a:xfrm>
-            <a:off x="1594800" y="1054800"/>
-            <a:ext cx="50400" cy="50400"/>
-          </a:xfrm>
-          <a:prstGeom prst="ellipse">
-            <a:avLst/>
-          </a:prstGeom>
-          <a:solidFill>
-            <a:srgbClr val="DCEED3"/>
-          </a:solidFill>
-          <a:ln>
-            <a:noFill/>
-          </a:ln>
-        </p:spPr>
-        <p:txBody>
-          <a:bodyPr rtlCol="0" anchor="ctr"/>
-          <a:lstStyle/>
-          <a:p>
-            <a:pPr algn="ctr"/>
-          </a:p>
-        </p:txBody>
-      </p:sp>
-      <p:sp>
-        <p:nvSpPr>
-          <p:cNvPr id="6" name="텍스트"/>
-          <p:cNvSpPr txBox="1"/>
-          <p:nvPr/>
-        </p:nvSpPr>
-        <p:spPr>
-          <a:xfrm>
-            <a:off x="360000" y="1224000"/>
-            <a:ext cx="2520000" cy="108000"/>
+            <a:off x="252000" y="540000"/>
+            <a:ext cx="1620000" cy="720000"/>
           </a:xfrm>
           <a:prstGeom prst="rect">
             <a:avLst/>
@@ -3705,15 +3501,72 @@
           </a:bodyPr>
           <a:lstStyle/>
           <a:p>
-            <a:pPr algn="ctr">
+            <a:pPr algn="l">
               <a:lnSpc>
-                <a:spcPts val="1087"/>
+                <a:spcPts val="1739"/>
               </a:lnSpc>
             </a:pPr>
             <a:r>
-              <a:rPr sz="750" b="1" spc="300">
+              <a:rPr sz="1200" b="1">
                 <a:solidFill>
-                  <a:srgbClr val="E9EEE6"/>
+                  <a:srgbClr val="12151C"/>
+                </a:solidFill>
+                <a:latin typeface="맑은 고딕"/>
+                <a:ea typeface="맑은 고딕"/>
+              </a:rPr>
+              <a:t>필요한 시점에</a:t>
+            </a:r>
+          </a:p>
+          <a:p>
+            <a:pPr algn="l">
+              <a:lnSpc>
+                <a:spcPts val="1739"/>
+              </a:lnSpc>
+            </a:pPr>
+            <a:r>
+              <a:rPr sz="1200" b="1">
+                <a:solidFill>
+                  <a:srgbClr val="12151C"/>
+                </a:solidFill>
+                <a:latin typeface="맑은 고딕"/>
+                <a:ea typeface="맑은 고딕"/>
+              </a:rPr>
+              <a:t>먼저 연락드립니다</a:t>
+            </a:r>
+          </a:p>
+        </p:txBody>
+      </p:sp>
+      <p:sp>
+        <p:nvSpPr>
+          <p:cNvPr id="6" name="텍스트"/>
+          <p:cNvSpPr txBox="1"/>
+          <p:nvPr/>
+        </p:nvSpPr>
+        <p:spPr>
+          <a:xfrm>
+            <a:off x="252000" y="1512000"/>
+            <a:ext cx="1584000" cy="123826"/>
+          </a:xfrm>
+          <a:prstGeom prst="rect">
+            <a:avLst/>
+          </a:prstGeom>
+          <a:noFill/>
+        </p:spPr>
+        <p:txBody>
+          <a:bodyPr wrap="square" lIns="0" rIns="0" tIns="0" bIns="0" anchor="t">
+            <a:spAutoFit/>
+          </a:bodyPr>
+          <a:lstStyle/>
+          <a:p>
+            <a:pPr algn="l">
+              <a:lnSpc>
+                <a:spcPts val="942"/>
+              </a:lnSpc>
+            </a:pPr>
+            <a:r>
+              <a:rPr sz="650" b="1" spc="200">
+                <a:solidFill>
+                  <a:srgbClr val="6B7280"/>
                 </a:solidFill>
                 <a:latin typeface="맑은 고딕"/>
                 <a:ea typeface="맑은 고딕"/>
@@ -3723,120 +3576,6 @@
           </a:p>
         </p:txBody>
       </p:sp>
-      <p:sp>
-        <p:nvSpPr>
-          <p:cNvPr id="7" name="Rounded Rectangle 6"/>
-          <p:cNvSpPr/>
-          <p:nvPr/>
-        </p:nvSpPr>
-        <p:spPr>
-          <a:xfrm>
-            <a:off x="1555200" y="334800"/>
-            <a:ext cx="36000" cy="64800"/>
-          </a:xfrm>
-          <a:prstGeom prst="roundRect">
-            <a:avLst>
-              <a:gd name="adj" fmla="val 10000"/>
-            </a:avLst>
-          </a:prstGeom>
-          <a:solidFill>
-            <a:srgbClr val="DCEED3"/>
-          </a:solidFill>
-          <a:ln>
-            <a:noFill/>
-          </a:ln>
-        </p:spPr>
-        <p:txBody>
-          <a:bodyPr rtlCol="0" anchor="ctr"/>
-          <a:lstStyle/>
-          <a:p>
-            <a:pPr algn="ctr"/>
-          </a:p>
-        </p:txBody>
-      </p:sp>
-      <p:sp>
-        <p:nvSpPr>
-          <p:cNvPr id="8" name="Rounded Rectangle 7"/>
-          <p:cNvSpPr/>
-          <p:nvPr/>
-        </p:nvSpPr>
-        <p:spPr>
-          <a:xfrm>
-            <a:off x="1602000" y="298800"/>
-            <a:ext cx="36000" cy="100800"/>
-          </a:xfrm>
-          <a:prstGeom prst="roundRect">
-            <a:avLst>
-              <a:gd name="adj" fmla="val 10000"/>
-            </a:avLst>
-          </a:prstGeom>
-          <a:solidFill>
-            <a:srgbClr val="668C54"/>
-          </a:solidFill>
-          <a:ln>
-            <a:noFill/>
-          </a:ln>
-        </p:spPr>
-        <p:txBody>
-          <a:bodyPr rtlCol="0" anchor="ctr"/>
-          <a:lstStyle/>
-          <a:p>
-            <a:pPr algn="ctr"/>
-          </a:p>
-        </p:txBody>
-      </p:sp>
-      <p:sp>
-        <p:nvSpPr>
-          <p:cNvPr id="9" name="Rounded Rectangle 8"/>
-          <p:cNvSpPr/>
-          <p:nvPr/>
-        </p:nvSpPr>
-        <p:spPr>
-          <a:xfrm>
-            <a:off x="1648800" y="255600"/>
-            <a:ext cx="36000" cy="144000"/>
-          </a:xfrm>
-          <a:prstGeom prst="roundRect">
-            <a:avLst>
-              <a:gd name="adj" fmla="val 10000"/>
-            </a:avLst>
-          </a:prstGeom>
-          <a:solidFill>
-            <a:srgbClr val="DCEED3"/>
-          </a:solidFill>
-          <a:ln>
-            <a:noFill/>
-          </a:ln>
-        </p:spPr>
-        <p:txBody>
-          <a:bodyPr rtlCol="0" anchor="ctr"/>
-          <a:lstStyle/>
-          <a:p>
-            <a:pPr algn="ctr"/>
-          </a:p>
-        </p:txBody>
-      </p:sp>
-      <p:cxnSp>
-        <p:nvCxnSpPr>
-          <p:cNvPr id="10" name="Connector 9"/>
-          <p:cNvCxnSpPr/>
-          <p:nvPr/>
-        </p:nvCxnSpPr>
-        <p:spPr>
-          <a:xfrm>
-            <a:off x="1540800" y="406800"/>
-            <a:ext cx="158400" cy="0"/>
-          </a:xfrm>
-          <a:prstGeom prst="line">
-            <a:avLst/>
-          </a:prstGeom>
-          <a:ln w="7200">
-            <a:solidFill>
-              <a:srgbClr val="668C54"/>
-            </a:solidFill>
-          </a:ln>
-        </p:spPr>
-      </p:cxnSp>
     </p:spTree>
   </p:cSld>
   <p:clrMapOvr>

--- a/public/fun/cards/finance/finance-27.pptx
+++ b/public/fun/cards/finance/finance-27.pptx
@@ -3097,25 +3097,193 @@
         <p:nvPr/>
       </p:nvGrpSpPr>
       <p:grpSpPr/>
-      <p:sp>
-        <p:nvSpPr>
-          <p:cNvPr id="2" name="Oval 1"/>
+      <p:cxnSp>
+        <p:nvCxnSpPr>
+          <p:cNvPr id="2" name="Connector 1"/>
+          <p:cNvCxnSpPr/>
+          <p:nvPr/>
+        </p:nvCxnSpPr>
+        <p:spPr>
+          <a:xfrm>
+            <a:off x="93600" y="122400"/>
+            <a:ext cx="57600" cy="0"/>
+          </a:xfrm>
+          <a:prstGeom prst="line">
+            <a:avLst/>
+          </a:prstGeom>
+          <a:ln w="3600">
+            <a:solidFill>
+              <a:srgbClr val="2A2F38"/>
+            </a:solidFill>
+          </a:ln>
+        </p:spPr>
+      </p:cxnSp>
+      <p:cxnSp>
+        <p:nvCxnSpPr>
+          <p:cNvPr id="3" name="Connector 2"/>
+          <p:cNvCxnSpPr/>
+          <p:nvPr/>
+        </p:nvCxnSpPr>
+        <p:spPr>
+          <a:xfrm>
+            <a:off x="122400" y="93600"/>
+            <a:ext cx="0" cy="57600"/>
+          </a:xfrm>
+          <a:prstGeom prst="line">
+            <a:avLst/>
+          </a:prstGeom>
+          <a:ln w="3600">
+            <a:solidFill>
+              <a:srgbClr val="2A2F38"/>
+            </a:solidFill>
+          </a:ln>
+        </p:spPr>
+      </p:cxnSp>
+      <p:cxnSp>
+        <p:nvCxnSpPr>
+          <p:cNvPr id="4" name="Connector 3"/>
+          <p:cNvCxnSpPr/>
+          <p:nvPr/>
+        </p:nvCxnSpPr>
+        <p:spPr>
+          <a:xfrm>
+            <a:off x="3088800" y="122400"/>
+            <a:ext cx="57600" cy="0"/>
+          </a:xfrm>
+          <a:prstGeom prst="line">
+            <a:avLst/>
+          </a:prstGeom>
+          <a:ln w="3600">
+            <a:solidFill>
+              <a:srgbClr val="2A2F38"/>
+            </a:solidFill>
+          </a:ln>
+        </p:spPr>
+      </p:cxnSp>
+      <p:cxnSp>
+        <p:nvCxnSpPr>
+          <p:cNvPr id="5" name="Connector 4"/>
+          <p:cNvCxnSpPr/>
+          <p:nvPr/>
+        </p:nvCxnSpPr>
+        <p:spPr>
+          <a:xfrm>
+            <a:off x="3117600" y="93600"/>
+            <a:ext cx="0" cy="57600"/>
+          </a:xfrm>
+          <a:prstGeom prst="line">
+            <a:avLst/>
+          </a:prstGeom>
+          <a:ln w="3600">
+            <a:solidFill>
+              <a:srgbClr val="2A2F38"/>
+            </a:solidFill>
+          </a:ln>
+        </p:spPr>
+      </p:cxnSp>
+      <p:cxnSp>
+        <p:nvCxnSpPr>
+          <p:cNvPr id="6" name="Connector 5"/>
+          <p:cNvCxnSpPr/>
+          <p:nvPr/>
+        </p:nvCxnSpPr>
+        <p:spPr>
+          <a:xfrm>
+            <a:off x="93600" y="1677600"/>
+            <a:ext cx="57600" cy="0"/>
+          </a:xfrm>
+          <a:prstGeom prst="line">
+            <a:avLst/>
+          </a:prstGeom>
+          <a:ln w="3600">
+            <a:solidFill>
+              <a:srgbClr val="2A2F38"/>
+            </a:solidFill>
+          </a:ln>
+        </p:spPr>
+      </p:cxnSp>
+      <p:cxnSp>
+        <p:nvCxnSpPr>
+          <p:cNvPr id="7" name="Connector 6"/>
+          <p:cNvCxnSpPr/>
+          <p:nvPr/>
+        </p:nvCxnSpPr>
+        <p:spPr>
+          <a:xfrm>
+            <a:off x="122400" y="1648800"/>
+            <a:ext cx="0" cy="57600"/>
+          </a:xfrm>
+          <a:prstGeom prst="line">
+            <a:avLst/>
+          </a:prstGeom>
+          <a:ln w="3600">
+            <a:solidFill>
+              <a:srgbClr val="2A2F38"/>
+            </a:solidFill>
+          </a:ln>
+        </p:spPr>
+      </p:cxnSp>
+      <p:cxnSp>
+        <p:nvCxnSpPr>
+          <p:cNvPr id="8" name="Connector 7"/>
+          <p:cNvCxnSpPr/>
+          <p:nvPr/>
+        </p:nvCxnSpPr>
+        <p:spPr>
+          <a:xfrm>
+            <a:off x="3088800" y="1677600"/>
+            <a:ext cx="57600" cy="0"/>
+          </a:xfrm>
+          <a:prstGeom prst="line">
+            <a:avLst/>
+          </a:prstGeom>
+          <a:ln w="3600">
+            <a:solidFill>
+              <a:srgbClr val="2A2F38"/>
+            </a:solidFill>
+          </a:ln>
+        </p:spPr>
+      </p:cxnSp>
+      <p:cxnSp>
+        <p:nvCxnSpPr>
+          <p:cNvPr id="9" name="Connector 8"/>
+          <p:cNvCxnSpPr/>
+          <p:nvPr/>
+        </p:nvCxnSpPr>
+        <p:spPr>
+          <a:xfrm>
+            <a:off x="3117600" y="1648800"/>
+            <a:ext cx="0" cy="57600"/>
+          </a:xfrm>
+          <a:prstGeom prst="line">
+            <a:avLst/>
+          </a:prstGeom>
+          <a:ln w="3600">
+            <a:solidFill>
+              <a:srgbClr val="2A2F38"/>
+            </a:solidFill>
+          </a:ln>
+        </p:spPr>
+      </p:cxnSp>
+      <p:sp>
+        <p:nvSpPr>
+          <p:cNvPr id="10" name="Oval 9"/>
           <p:cNvSpPr/>
           <p:nvPr/>
         </p:nvSpPr>
         <p:spPr>
           <a:xfrm>
-            <a:off x="1591200" y="208800"/>
-            <a:ext cx="57600" cy="57600"/>
+            <a:off x="1526400" y="237600"/>
+            <a:ext cx="187200" cy="187200"/>
           </a:xfrm>
           <a:prstGeom prst="ellipse">
             <a:avLst/>
           </a:prstGeom>
-          <a:solidFill>
-            <a:srgbClr val="FF2E93"/>
-          </a:solidFill>
-          <a:ln>
-            <a:noFill/>
+          <a:noFill/>
+          <a:ln w="5040">
+            <a:solidFill>
+              <a:srgbClr val="FF2E93"/>
+            </a:solidFill>
           </a:ln>
         </p:spPr>
         <p:txBody>
@@ -3128,14 +3296,54 @@
       </p:sp>
       <p:sp>
         <p:nvSpPr>
-          <p:cNvPr id="3" name="텍스트"/>
+          <p:cNvPr id="11" name="텍스트"/>
           <p:cNvSpPr txBox="1"/>
           <p:nvPr/>
         </p:nvSpPr>
         <p:spPr>
           <a:xfrm>
-            <a:off x="360000" y="468000"/>
-            <a:ext cx="2520000" cy="360000"/>
+            <a:off x="1476000" y="237600"/>
+            <a:ext cx="288000" cy="187200"/>
+          </a:xfrm>
+          <a:prstGeom prst="rect">
+            <a:avLst/>
+          </a:prstGeom>
+          <a:noFill/>
+        </p:spPr>
+        <p:txBody>
+          <a:bodyPr wrap="square" lIns="0" rIns="0" tIns="0" bIns="0" anchor="ctr">
+            <a:spAutoFit/>
+          </a:bodyPr>
+          <a:lstStyle/>
+          <a:p>
+            <a:pPr algn="ctr">
+              <a:lnSpc>
+                <a:spcPts val="1305"/>
+              </a:lnSpc>
+            </a:pPr>
+            <a:r>
+              <a:rPr sz="900" b="1">
+                <a:solidFill>
+                  <a:srgbClr val="FF2E93"/>
+                </a:solidFill>
+                <a:latin typeface="맑은 고딕"/>
+                <a:ea typeface="맑은 고딕"/>
+              </a:rPr>
+              <a:t>회</a:t>
+            </a:r>
+          </a:p>
+        </p:txBody>
+      </p:sp>
+      <p:sp>
+        <p:nvSpPr>
+          <p:cNvPr id="12" name="텍스트"/>
+          <p:cNvSpPr txBox="1"/>
+          <p:nvPr/>
+        </p:nvSpPr>
+        <p:spPr>
+          <a:xfrm>
+            <a:off x="360000" y="540000"/>
+            <a:ext cx="2520000" cy="237600"/>
           </a:xfrm>
           <a:prstGeom prst="rect">
             <a:avLst/>
@@ -3150,11 +3358,11 @@
           <a:p>
             <a:pPr algn="ctr">
               <a:lnSpc>
-                <a:spcPts val="3190"/>
+                <a:spcPts val="1957"/>
               </a:lnSpc>
             </a:pPr>
             <a:r>
-              <a:rPr sz="2200" b="1">
+              <a:rPr sz="1350" b="1" spc="120">
                 <a:solidFill>
                   <a:srgbClr val="FFFFFF"/>
                 </a:solidFill>
@@ -3168,14 +3376,14 @@
       </p:sp>
       <p:sp>
         <p:nvSpPr>
-          <p:cNvPr id="4" name="텍스트"/>
+          <p:cNvPr id="13" name="텍스트"/>
           <p:cNvSpPr txBox="1"/>
           <p:nvPr/>
         </p:nvSpPr>
         <p:spPr>
           <a:xfrm>
-            <a:off x="360000" y="878400"/>
-            <a:ext cx="2520000" cy="171451"/>
+            <a:off x="360000" y="792000"/>
+            <a:ext cx="2520000" cy="133351"/>
           </a:xfrm>
           <a:prstGeom prst="rect">
             <a:avLst/>
@@ -3190,11 +3398,11 @@
           <a:p>
             <a:pPr algn="ctr">
               <a:lnSpc>
-                <a:spcPts val="1305"/>
+                <a:spcPts val="1015"/>
               </a:lnSpc>
             </a:pPr>
             <a:r>
-              <a:rPr sz="900" b="0">
+              <a:rPr sz="700" b="0" spc="60">
                 <a:solidFill>
                   <a:srgbClr val="A3A9B5"/>
                 </a:solidFill>
@@ -3206,45 +3414,37 @@
           </a:p>
         </p:txBody>
       </p:sp>
-      <p:sp>
-        <p:nvSpPr>
-          <p:cNvPr id="5" name="Rectangle 4"/>
-          <p:cNvSpPr/>
-          <p:nvPr/>
-        </p:nvSpPr>
-        <p:spPr>
-          <a:xfrm>
-            <a:off x="1530000" y="1137600"/>
-            <a:ext cx="180000" cy="14400"/>
-          </a:xfrm>
-          <a:prstGeom prst="rect">
-            <a:avLst/>
-          </a:prstGeom>
-          <a:solidFill>
-            <a:srgbClr val="FF2E93"/>
-          </a:solidFill>
-          <a:ln>
-            <a:noFill/>
+      <p:cxnSp>
+        <p:nvCxnSpPr>
+          <p:cNvPr id="14" name="Connector 13"/>
+          <p:cNvCxnSpPr/>
+          <p:nvPr/>
+        </p:nvCxnSpPr>
+        <p:spPr>
+          <a:xfrm>
+            <a:off x="1440000" y="1015200"/>
+            <a:ext cx="360000" cy="0"/>
+          </a:xfrm>
+          <a:prstGeom prst="line">
+            <a:avLst/>
+          </a:prstGeom>
+          <a:ln w="7920">
+            <a:solidFill>
+              <a:srgbClr val="FF2E93"/>
+            </a:solidFill>
           </a:ln>
         </p:spPr>
-        <p:txBody>
-          <a:bodyPr rtlCol="0" anchor="ctr"/>
-          <a:lstStyle/>
-          <a:p>
-            <a:pPr algn="ctr"/>
-          </a:p>
-        </p:txBody>
-      </p:sp>
-      <p:sp>
-        <p:nvSpPr>
-          <p:cNvPr id="6" name="텍스트"/>
+      </p:cxnSp>
+      <p:sp>
+        <p:nvSpPr>
+          <p:cNvPr id="15" name="텍스트"/>
           <p:cNvSpPr txBox="1"/>
           <p:nvPr/>
         </p:nvSpPr>
         <p:spPr>
           <a:xfrm>
-            <a:off x="360000" y="1267200"/>
-            <a:ext cx="2520000" cy="133351"/>
+            <a:off x="360000" y="1101600"/>
+            <a:ext cx="2520000" cy="123826"/>
           </a:xfrm>
           <a:prstGeom prst="rect">
             <a:avLst/>
@@ -3259,32 +3459,72 @@
           <a:p>
             <a:pPr algn="ctr">
               <a:lnSpc>
-                <a:spcPts val="1015"/>
+                <a:spcPts val="942"/>
               </a:lnSpc>
             </a:pPr>
             <a:r>
-              <a:rPr sz="700" b="0">
+              <a:rPr sz="650" b="1" spc="220">
+                <a:solidFill>
+                  <a:srgbClr val="A3A9B5"/>
+                </a:solidFill>
+                <a:latin typeface="맑은 고딕"/>
+                <a:ea typeface="맑은 고딕"/>
+              </a:rPr>
+              <a:t>회사 · 사무소 이름</a:t>
+            </a:r>
+          </a:p>
+        </p:txBody>
+      </p:sp>
+      <p:sp>
+        <p:nvSpPr>
+          <p:cNvPr id="16" name="텍스트"/>
+          <p:cNvSpPr txBox="1"/>
+          <p:nvPr/>
+        </p:nvSpPr>
+        <p:spPr>
+          <a:xfrm>
+            <a:off x="360000" y="1339200"/>
+            <a:ext cx="2520000" cy="123826"/>
+          </a:xfrm>
+          <a:prstGeom prst="rect">
+            <a:avLst/>
+          </a:prstGeom>
+          <a:noFill/>
+        </p:spPr>
+        <p:txBody>
+          <a:bodyPr wrap="square" lIns="0" rIns="0" tIns="0" bIns="0" anchor="t">
+            <a:spAutoFit/>
+          </a:bodyPr>
+          <a:lstStyle/>
+          <a:p>
+            <a:pPr algn="ctr">
+              <a:lnSpc>
+                <a:spcPts val="942"/>
+              </a:lnSpc>
+            </a:pPr>
+            <a:r>
+              <a:rPr sz="650" b="0">
                 <a:solidFill>
                   <a:srgbClr val="FFFFFF"/>
                 </a:solidFill>
                 <a:latin typeface="맑은 고딕"/>
                 <a:ea typeface="맑은 고딕"/>
               </a:rPr>
-              <a:t>010-1234-5678      name@example.com</a:t>
-            </a:r>
-          </a:p>
-        </p:txBody>
-      </p:sp>
-      <p:sp>
-        <p:nvSpPr>
-          <p:cNvPr id="7" name="텍스트"/>
+              <a:t>010-1234-5678     |     name@example.com</a:t>
+            </a:r>
+          </a:p>
+        </p:txBody>
+      </p:sp>
+      <p:sp>
+        <p:nvSpPr>
+          <p:cNvPr id="17" name="텍스트"/>
           <p:cNvSpPr txBox="1"/>
           <p:nvPr/>
         </p:nvSpPr>
         <p:spPr>
           <a:xfrm>
-            <a:off x="360000" y="1425600"/>
-            <a:ext cx="2520000" cy="133351"/>
+            <a:off x="360000" y="1476000"/>
+            <a:ext cx="2520000" cy="123826"/>
           </a:xfrm>
           <a:prstGeom prst="rect">
             <a:avLst/>
@@ -3299,11 +3539,11 @@
           <a:p>
             <a:pPr algn="ctr">
               <a:lnSpc>
-                <a:spcPts val="1015"/>
+                <a:spcPts val="942"/>
               </a:lnSpc>
             </a:pPr>
             <a:r>
-              <a:rPr sz="700" b="0">
+              <a:rPr sz="650" b="0">
                 <a:solidFill>
                   <a:srgbClr val="A3A9B5"/>
                 </a:solidFill>
@@ -3311,46 +3551,6 @@
                 <a:ea typeface="맑은 고딕"/>
               </a:rPr>
               <a:t>주소를 입력해 주세요</a:t>
-            </a:r>
-          </a:p>
-        </p:txBody>
-      </p:sp>
-      <p:sp>
-        <p:nvSpPr>
-          <p:cNvPr id="8" name="텍스트"/>
-          <p:cNvSpPr txBox="1"/>
-          <p:nvPr/>
-        </p:nvSpPr>
-        <p:spPr>
-          <a:xfrm>
-            <a:off x="360000" y="1576800"/>
-            <a:ext cx="2520000" cy="104776"/>
-          </a:xfrm>
-          <a:prstGeom prst="rect">
-            <a:avLst/>
-          </a:prstGeom>
-          <a:noFill/>
-        </p:spPr>
-        <p:txBody>
-          <a:bodyPr wrap="square" lIns="0" rIns="0" tIns="0" bIns="0" anchor="t">
-            <a:spAutoFit/>
-          </a:bodyPr>
-          <a:lstStyle/>
-          <a:p>
-            <a:pPr algn="ctr">
-              <a:lnSpc>
-                <a:spcPts val="797"/>
-              </a:lnSpc>
-            </a:pPr>
-            <a:r>
-              <a:rPr sz="550" b="1" spc="300">
-                <a:solidFill>
-                  <a:srgbClr val="A3A9B5"/>
-                </a:solidFill>
-                <a:latin typeface="맑은 고딕"/>
-                <a:ea typeface="맑은 고딕"/>
-              </a:rPr>
-              <a:t>회사 · 사무소 이름</a:t>
             </a:r>
           </a:p>
         </p:txBody>
@@ -3389,8 +3589,8 @@
         </p:nvSpPr>
         <p:spPr>
           <a:xfrm>
-            <a:off x="2088000" y="0"/>
-            <a:ext cx="1152000" cy="1800000"/>
+            <a:off x="0" y="0"/>
+            <a:ext cx="1188000" cy="1800000"/>
           </a:xfrm>
           <a:prstGeom prst="rect">
             <a:avLst/>
@@ -3410,27 +3610,657 @@
           </a:p>
         </p:txBody>
       </p:sp>
-      <p:sp>
-        <p:nvSpPr>
-          <p:cNvPr id="3" name="Oval 2"/>
-          <p:cNvSpPr/>
-          <p:nvPr/>
-        </p:nvSpPr>
-        <p:spPr>
-          <a:xfrm>
-            <a:off x="2397600" y="633600"/>
-            <a:ext cx="532800" cy="532800"/>
-          </a:xfrm>
-          <a:prstGeom prst="ellipse">
-            <a:avLst/>
-          </a:prstGeom>
-          <a:noFill/>
-          <a:ln w="10800">
+      <p:cxnSp>
+        <p:nvCxnSpPr>
+          <p:cNvPr id="3" name="Connector 2"/>
+          <p:cNvCxnSpPr/>
+          <p:nvPr/>
+        </p:nvCxnSpPr>
+        <p:spPr>
+          <a:xfrm flipV="1">
+            <a:off x="0" y="1224000"/>
+            <a:ext cx="57600" cy="57600"/>
+          </a:xfrm>
+          <a:prstGeom prst="line">
+            <a:avLst/>
+          </a:prstGeom>
+          <a:ln w="3600">
             <a:solidFill>
               <a:srgbClr val="FFFFFF"/>
             </a:solidFill>
           </a:ln>
         </p:spPr>
+      </p:cxnSp>
+      <p:cxnSp>
+        <p:nvCxnSpPr>
+          <p:cNvPr id="4" name="Connector 3"/>
+          <p:cNvCxnSpPr/>
+          <p:nvPr/>
+        </p:nvCxnSpPr>
+        <p:spPr>
+          <a:xfrm flipV="1">
+            <a:off x="0" y="1224000"/>
+            <a:ext cx="115200" cy="115200"/>
+          </a:xfrm>
+          <a:prstGeom prst="line">
+            <a:avLst/>
+          </a:prstGeom>
+          <a:ln w="3600">
+            <a:solidFill>
+              <a:srgbClr val="FFFFFF"/>
+            </a:solidFill>
+          </a:ln>
+        </p:spPr>
+      </p:cxnSp>
+      <p:cxnSp>
+        <p:nvCxnSpPr>
+          <p:cNvPr id="5" name="Connector 4"/>
+          <p:cNvCxnSpPr/>
+          <p:nvPr/>
+        </p:nvCxnSpPr>
+        <p:spPr>
+          <a:xfrm flipV="1">
+            <a:off x="0" y="1224000"/>
+            <a:ext cx="172800" cy="172800"/>
+          </a:xfrm>
+          <a:prstGeom prst="line">
+            <a:avLst/>
+          </a:prstGeom>
+          <a:ln w="3600">
+            <a:solidFill>
+              <a:srgbClr val="FFFFFF"/>
+            </a:solidFill>
+          </a:ln>
+        </p:spPr>
+      </p:cxnSp>
+      <p:cxnSp>
+        <p:nvCxnSpPr>
+          <p:cNvPr id="6" name="Connector 5"/>
+          <p:cNvCxnSpPr/>
+          <p:nvPr/>
+        </p:nvCxnSpPr>
+        <p:spPr>
+          <a:xfrm flipV="1">
+            <a:off x="0" y="1224000"/>
+            <a:ext cx="230400" cy="230400"/>
+          </a:xfrm>
+          <a:prstGeom prst="line">
+            <a:avLst/>
+          </a:prstGeom>
+          <a:ln w="3600">
+            <a:solidFill>
+              <a:srgbClr val="FFFFFF"/>
+            </a:solidFill>
+          </a:ln>
+        </p:spPr>
+      </p:cxnSp>
+      <p:cxnSp>
+        <p:nvCxnSpPr>
+          <p:cNvPr id="7" name="Connector 6"/>
+          <p:cNvCxnSpPr/>
+          <p:nvPr/>
+        </p:nvCxnSpPr>
+        <p:spPr>
+          <a:xfrm flipV="1">
+            <a:off x="0" y="1224000"/>
+            <a:ext cx="288000" cy="288000"/>
+          </a:xfrm>
+          <a:prstGeom prst="line">
+            <a:avLst/>
+          </a:prstGeom>
+          <a:ln w="3600">
+            <a:solidFill>
+              <a:srgbClr val="FFFFFF"/>
+            </a:solidFill>
+          </a:ln>
+        </p:spPr>
+      </p:cxnSp>
+      <p:cxnSp>
+        <p:nvCxnSpPr>
+          <p:cNvPr id="8" name="Connector 7"/>
+          <p:cNvCxnSpPr/>
+          <p:nvPr/>
+        </p:nvCxnSpPr>
+        <p:spPr>
+          <a:xfrm flipV="1">
+            <a:off x="0" y="1224000"/>
+            <a:ext cx="345600" cy="345600"/>
+          </a:xfrm>
+          <a:prstGeom prst="line">
+            <a:avLst/>
+          </a:prstGeom>
+          <a:ln w="3600">
+            <a:solidFill>
+              <a:srgbClr val="FFFFFF"/>
+            </a:solidFill>
+          </a:ln>
+        </p:spPr>
+      </p:cxnSp>
+      <p:cxnSp>
+        <p:nvCxnSpPr>
+          <p:cNvPr id="9" name="Connector 8"/>
+          <p:cNvCxnSpPr/>
+          <p:nvPr/>
+        </p:nvCxnSpPr>
+        <p:spPr>
+          <a:xfrm flipV="1">
+            <a:off x="0" y="1224000"/>
+            <a:ext cx="403200" cy="403200"/>
+          </a:xfrm>
+          <a:prstGeom prst="line">
+            <a:avLst/>
+          </a:prstGeom>
+          <a:ln w="3600">
+            <a:solidFill>
+              <a:srgbClr val="FFFFFF"/>
+            </a:solidFill>
+          </a:ln>
+        </p:spPr>
+      </p:cxnSp>
+      <p:cxnSp>
+        <p:nvCxnSpPr>
+          <p:cNvPr id="10" name="Connector 9"/>
+          <p:cNvCxnSpPr/>
+          <p:nvPr/>
+        </p:nvCxnSpPr>
+        <p:spPr>
+          <a:xfrm flipV="1">
+            <a:off x="0" y="1224000"/>
+            <a:ext cx="460800" cy="460800"/>
+          </a:xfrm>
+          <a:prstGeom prst="line">
+            <a:avLst/>
+          </a:prstGeom>
+          <a:ln w="3600">
+            <a:solidFill>
+              <a:srgbClr val="FFFFFF"/>
+            </a:solidFill>
+          </a:ln>
+        </p:spPr>
+      </p:cxnSp>
+      <p:cxnSp>
+        <p:nvCxnSpPr>
+          <p:cNvPr id="11" name="Connector 10"/>
+          <p:cNvCxnSpPr/>
+          <p:nvPr/>
+        </p:nvCxnSpPr>
+        <p:spPr>
+          <a:xfrm flipV="1">
+            <a:off x="0" y="1224000"/>
+            <a:ext cx="518400" cy="518400"/>
+          </a:xfrm>
+          <a:prstGeom prst="line">
+            <a:avLst/>
+          </a:prstGeom>
+          <a:ln w="3600">
+            <a:solidFill>
+              <a:srgbClr val="FFFFFF"/>
+            </a:solidFill>
+          </a:ln>
+        </p:spPr>
+      </p:cxnSp>
+      <p:cxnSp>
+        <p:nvCxnSpPr>
+          <p:cNvPr id="12" name="Connector 11"/>
+          <p:cNvCxnSpPr/>
+          <p:nvPr/>
+        </p:nvCxnSpPr>
+        <p:spPr>
+          <a:xfrm flipV="1">
+            <a:off x="0" y="1224000"/>
+            <a:ext cx="576000" cy="576000"/>
+          </a:xfrm>
+          <a:prstGeom prst="line">
+            <a:avLst/>
+          </a:prstGeom>
+          <a:ln w="3600">
+            <a:solidFill>
+              <a:srgbClr val="FFFFFF"/>
+            </a:solidFill>
+          </a:ln>
+        </p:spPr>
+      </p:cxnSp>
+      <p:cxnSp>
+        <p:nvCxnSpPr>
+          <p:cNvPr id="13" name="Connector 12"/>
+          <p:cNvCxnSpPr/>
+          <p:nvPr/>
+        </p:nvCxnSpPr>
+        <p:spPr>
+          <a:xfrm flipV="1">
+            <a:off x="57600" y="1224000"/>
+            <a:ext cx="576000" cy="576000"/>
+          </a:xfrm>
+          <a:prstGeom prst="line">
+            <a:avLst/>
+          </a:prstGeom>
+          <a:ln w="3600">
+            <a:solidFill>
+              <a:srgbClr val="FFFFFF"/>
+            </a:solidFill>
+          </a:ln>
+        </p:spPr>
+      </p:cxnSp>
+      <p:cxnSp>
+        <p:nvCxnSpPr>
+          <p:cNvPr id="14" name="Connector 13"/>
+          <p:cNvCxnSpPr/>
+          <p:nvPr/>
+        </p:nvCxnSpPr>
+        <p:spPr>
+          <a:xfrm flipV="1">
+            <a:off x="115200" y="1224000"/>
+            <a:ext cx="576000" cy="576000"/>
+          </a:xfrm>
+          <a:prstGeom prst="line">
+            <a:avLst/>
+          </a:prstGeom>
+          <a:ln w="3600">
+            <a:solidFill>
+              <a:srgbClr val="FFFFFF"/>
+            </a:solidFill>
+          </a:ln>
+        </p:spPr>
+      </p:cxnSp>
+      <p:cxnSp>
+        <p:nvCxnSpPr>
+          <p:cNvPr id="15" name="Connector 14"/>
+          <p:cNvCxnSpPr/>
+          <p:nvPr/>
+        </p:nvCxnSpPr>
+        <p:spPr>
+          <a:xfrm flipV="1">
+            <a:off x="172800" y="1224000"/>
+            <a:ext cx="576000" cy="576000"/>
+          </a:xfrm>
+          <a:prstGeom prst="line">
+            <a:avLst/>
+          </a:prstGeom>
+          <a:ln w="3600">
+            <a:solidFill>
+              <a:srgbClr val="FFFFFF"/>
+            </a:solidFill>
+          </a:ln>
+        </p:spPr>
+      </p:cxnSp>
+      <p:cxnSp>
+        <p:nvCxnSpPr>
+          <p:cNvPr id="16" name="Connector 15"/>
+          <p:cNvCxnSpPr/>
+          <p:nvPr/>
+        </p:nvCxnSpPr>
+        <p:spPr>
+          <a:xfrm flipV="1">
+            <a:off x="230400" y="1224000"/>
+            <a:ext cx="576000" cy="576000"/>
+          </a:xfrm>
+          <a:prstGeom prst="line">
+            <a:avLst/>
+          </a:prstGeom>
+          <a:ln w="3600">
+            <a:solidFill>
+              <a:srgbClr val="FFFFFF"/>
+            </a:solidFill>
+          </a:ln>
+        </p:spPr>
+      </p:cxnSp>
+      <p:cxnSp>
+        <p:nvCxnSpPr>
+          <p:cNvPr id="17" name="Connector 16"/>
+          <p:cNvCxnSpPr/>
+          <p:nvPr/>
+        </p:nvCxnSpPr>
+        <p:spPr>
+          <a:xfrm flipV="1">
+            <a:off x="288000" y="1224000"/>
+            <a:ext cx="576000" cy="576000"/>
+          </a:xfrm>
+          <a:prstGeom prst="line">
+            <a:avLst/>
+          </a:prstGeom>
+          <a:ln w="3600">
+            <a:solidFill>
+              <a:srgbClr val="FFFFFF"/>
+            </a:solidFill>
+          </a:ln>
+        </p:spPr>
+      </p:cxnSp>
+      <p:cxnSp>
+        <p:nvCxnSpPr>
+          <p:cNvPr id="18" name="Connector 17"/>
+          <p:cNvCxnSpPr/>
+          <p:nvPr/>
+        </p:nvCxnSpPr>
+        <p:spPr>
+          <a:xfrm flipV="1">
+            <a:off x="345600" y="1224000"/>
+            <a:ext cx="576000" cy="576000"/>
+          </a:xfrm>
+          <a:prstGeom prst="line">
+            <a:avLst/>
+          </a:prstGeom>
+          <a:ln w="3600">
+            <a:solidFill>
+              <a:srgbClr val="FFFFFF"/>
+            </a:solidFill>
+          </a:ln>
+        </p:spPr>
+      </p:cxnSp>
+      <p:cxnSp>
+        <p:nvCxnSpPr>
+          <p:cNvPr id="19" name="Connector 18"/>
+          <p:cNvCxnSpPr/>
+          <p:nvPr/>
+        </p:nvCxnSpPr>
+        <p:spPr>
+          <a:xfrm flipV="1">
+            <a:off x="403200" y="1224000"/>
+            <a:ext cx="576000" cy="576000"/>
+          </a:xfrm>
+          <a:prstGeom prst="line">
+            <a:avLst/>
+          </a:prstGeom>
+          <a:ln w="3600">
+            <a:solidFill>
+              <a:srgbClr val="FFFFFF"/>
+            </a:solidFill>
+          </a:ln>
+        </p:spPr>
+      </p:cxnSp>
+      <p:cxnSp>
+        <p:nvCxnSpPr>
+          <p:cNvPr id="20" name="Connector 19"/>
+          <p:cNvCxnSpPr/>
+          <p:nvPr/>
+        </p:nvCxnSpPr>
+        <p:spPr>
+          <a:xfrm flipV="1">
+            <a:off x="460800" y="1224000"/>
+            <a:ext cx="576000" cy="576000"/>
+          </a:xfrm>
+          <a:prstGeom prst="line">
+            <a:avLst/>
+          </a:prstGeom>
+          <a:ln w="3600">
+            <a:solidFill>
+              <a:srgbClr val="FFFFFF"/>
+            </a:solidFill>
+          </a:ln>
+        </p:spPr>
+      </p:cxnSp>
+      <p:cxnSp>
+        <p:nvCxnSpPr>
+          <p:cNvPr id="21" name="Connector 20"/>
+          <p:cNvCxnSpPr/>
+          <p:nvPr/>
+        </p:nvCxnSpPr>
+        <p:spPr>
+          <a:xfrm flipV="1">
+            <a:off x="518400" y="1224000"/>
+            <a:ext cx="576000" cy="576000"/>
+          </a:xfrm>
+          <a:prstGeom prst="line">
+            <a:avLst/>
+          </a:prstGeom>
+          <a:ln w="3600">
+            <a:solidFill>
+              <a:srgbClr val="FFFFFF"/>
+            </a:solidFill>
+          </a:ln>
+        </p:spPr>
+      </p:cxnSp>
+      <p:cxnSp>
+        <p:nvCxnSpPr>
+          <p:cNvPr id="22" name="Connector 21"/>
+          <p:cNvCxnSpPr/>
+          <p:nvPr/>
+        </p:nvCxnSpPr>
+        <p:spPr>
+          <a:xfrm flipV="1">
+            <a:off x="576000" y="1224000"/>
+            <a:ext cx="576000" cy="576000"/>
+          </a:xfrm>
+          <a:prstGeom prst="line">
+            <a:avLst/>
+          </a:prstGeom>
+          <a:ln w="3600">
+            <a:solidFill>
+              <a:srgbClr val="FFFFFF"/>
+            </a:solidFill>
+          </a:ln>
+        </p:spPr>
+      </p:cxnSp>
+      <p:cxnSp>
+        <p:nvCxnSpPr>
+          <p:cNvPr id="23" name="Connector 22"/>
+          <p:cNvCxnSpPr/>
+          <p:nvPr/>
+        </p:nvCxnSpPr>
+        <p:spPr>
+          <a:xfrm flipV="1">
+            <a:off x="633600" y="1245600"/>
+            <a:ext cx="554400" cy="554400"/>
+          </a:xfrm>
+          <a:prstGeom prst="line">
+            <a:avLst/>
+          </a:prstGeom>
+          <a:ln w="3600">
+            <a:solidFill>
+              <a:srgbClr val="FFFFFF"/>
+            </a:solidFill>
+          </a:ln>
+        </p:spPr>
+      </p:cxnSp>
+      <p:cxnSp>
+        <p:nvCxnSpPr>
+          <p:cNvPr id="24" name="Connector 23"/>
+          <p:cNvCxnSpPr/>
+          <p:nvPr/>
+        </p:nvCxnSpPr>
+        <p:spPr>
+          <a:xfrm flipV="1">
+            <a:off x="691200" y="1303200"/>
+            <a:ext cx="496800" cy="496800"/>
+          </a:xfrm>
+          <a:prstGeom prst="line">
+            <a:avLst/>
+          </a:prstGeom>
+          <a:ln w="3600">
+            <a:solidFill>
+              <a:srgbClr val="FFFFFF"/>
+            </a:solidFill>
+          </a:ln>
+        </p:spPr>
+      </p:cxnSp>
+      <p:cxnSp>
+        <p:nvCxnSpPr>
+          <p:cNvPr id="25" name="Connector 24"/>
+          <p:cNvCxnSpPr/>
+          <p:nvPr/>
+        </p:nvCxnSpPr>
+        <p:spPr>
+          <a:xfrm flipV="1">
+            <a:off x="748800" y="1360800"/>
+            <a:ext cx="439200" cy="439200"/>
+          </a:xfrm>
+          <a:prstGeom prst="line">
+            <a:avLst/>
+          </a:prstGeom>
+          <a:ln w="3600">
+            <a:solidFill>
+              <a:srgbClr val="FFFFFF"/>
+            </a:solidFill>
+          </a:ln>
+        </p:spPr>
+      </p:cxnSp>
+      <p:cxnSp>
+        <p:nvCxnSpPr>
+          <p:cNvPr id="26" name="Connector 25"/>
+          <p:cNvCxnSpPr/>
+          <p:nvPr/>
+        </p:nvCxnSpPr>
+        <p:spPr>
+          <a:xfrm flipV="1">
+            <a:off x="806400" y="1418400"/>
+            <a:ext cx="381600" cy="381600"/>
+          </a:xfrm>
+          <a:prstGeom prst="line">
+            <a:avLst/>
+          </a:prstGeom>
+          <a:ln w="3600">
+            <a:solidFill>
+              <a:srgbClr val="FFFFFF"/>
+            </a:solidFill>
+          </a:ln>
+        </p:spPr>
+      </p:cxnSp>
+      <p:cxnSp>
+        <p:nvCxnSpPr>
+          <p:cNvPr id="27" name="Connector 26"/>
+          <p:cNvCxnSpPr/>
+          <p:nvPr/>
+        </p:nvCxnSpPr>
+        <p:spPr>
+          <a:xfrm flipV="1">
+            <a:off x="864000" y="1476000"/>
+            <a:ext cx="324000" cy="324000"/>
+          </a:xfrm>
+          <a:prstGeom prst="line">
+            <a:avLst/>
+          </a:prstGeom>
+          <a:ln w="3600">
+            <a:solidFill>
+              <a:srgbClr val="FFFFFF"/>
+            </a:solidFill>
+          </a:ln>
+        </p:spPr>
+      </p:cxnSp>
+      <p:cxnSp>
+        <p:nvCxnSpPr>
+          <p:cNvPr id="28" name="Connector 27"/>
+          <p:cNvCxnSpPr/>
+          <p:nvPr/>
+        </p:nvCxnSpPr>
+        <p:spPr>
+          <a:xfrm flipV="1">
+            <a:off x="921600" y="1533600"/>
+            <a:ext cx="266400" cy="266400"/>
+          </a:xfrm>
+          <a:prstGeom prst="line">
+            <a:avLst/>
+          </a:prstGeom>
+          <a:ln w="3600">
+            <a:solidFill>
+              <a:srgbClr val="FFFFFF"/>
+            </a:solidFill>
+          </a:ln>
+        </p:spPr>
+      </p:cxnSp>
+      <p:cxnSp>
+        <p:nvCxnSpPr>
+          <p:cNvPr id="29" name="Connector 28"/>
+          <p:cNvCxnSpPr/>
+          <p:nvPr/>
+        </p:nvCxnSpPr>
+        <p:spPr>
+          <a:xfrm flipV="1">
+            <a:off x="979200" y="1591200"/>
+            <a:ext cx="208800" cy="208800"/>
+          </a:xfrm>
+          <a:prstGeom prst="line">
+            <a:avLst/>
+          </a:prstGeom>
+          <a:ln w="3600">
+            <a:solidFill>
+              <a:srgbClr val="FFFFFF"/>
+            </a:solidFill>
+          </a:ln>
+        </p:spPr>
+      </p:cxnSp>
+      <p:cxnSp>
+        <p:nvCxnSpPr>
+          <p:cNvPr id="30" name="Connector 29"/>
+          <p:cNvCxnSpPr/>
+          <p:nvPr/>
+        </p:nvCxnSpPr>
+        <p:spPr>
+          <a:xfrm flipV="1">
+            <a:off x="1036800" y="1648800"/>
+            <a:ext cx="151200" cy="151200"/>
+          </a:xfrm>
+          <a:prstGeom prst="line">
+            <a:avLst/>
+          </a:prstGeom>
+          <a:ln w="3600">
+            <a:solidFill>
+              <a:srgbClr val="FFFFFF"/>
+            </a:solidFill>
+          </a:ln>
+        </p:spPr>
+      </p:cxnSp>
+      <p:cxnSp>
+        <p:nvCxnSpPr>
+          <p:cNvPr id="31" name="Connector 30"/>
+          <p:cNvCxnSpPr/>
+          <p:nvPr/>
+        </p:nvCxnSpPr>
+        <p:spPr>
+          <a:xfrm flipV="1">
+            <a:off x="1094400" y="1706400"/>
+            <a:ext cx="93600" cy="93600"/>
+          </a:xfrm>
+          <a:prstGeom prst="line">
+            <a:avLst/>
+          </a:prstGeom>
+          <a:ln w="3600">
+            <a:solidFill>
+              <a:srgbClr val="FFFFFF"/>
+            </a:solidFill>
+          </a:ln>
+        </p:spPr>
+      </p:cxnSp>
+      <p:cxnSp>
+        <p:nvCxnSpPr>
+          <p:cNvPr id="32" name="Connector 31"/>
+          <p:cNvCxnSpPr/>
+          <p:nvPr/>
+        </p:nvCxnSpPr>
+        <p:spPr>
+          <a:xfrm flipV="1">
+            <a:off x="1152000" y="1764000"/>
+            <a:ext cx="36000" cy="36000"/>
+          </a:xfrm>
+          <a:prstGeom prst="line">
+            <a:avLst/>
+          </a:prstGeom>
+          <a:ln w="3600">
+            <a:solidFill>
+              <a:srgbClr val="FFFFFF"/>
+            </a:solidFill>
+          </a:ln>
+        </p:spPr>
+      </p:cxnSp>
+      <p:sp>
+        <p:nvSpPr>
+          <p:cNvPr id="33" name="Oval 32"/>
+          <p:cNvSpPr/>
+          <p:nvPr/>
+        </p:nvSpPr>
+        <p:spPr>
+          <a:xfrm>
+            <a:off x="216000" y="252000"/>
+            <a:ext cx="288000" cy="288000"/>
+          </a:xfrm>
+          <a:prstGeom prst="ellipse">
+            <a:avLst/>
+          </a:prstGeom>
+          <a:noFill/>
+          <a:ln w="5760">
+            <a:solidFill>
+              <a:srgbClr val="FFFFFF"/>
+            </a:solidFill>
+          </a:ln>
+        </p:spPr>
         <p:txBody>
           <a:bodyPr rtlCol="0" anchor="ctr"/>
           <a:lstStyle/>
@@ -3441,14 +4271,14 @@
       </p:sp>
       <p:sp>
         <p:nvSpPr>
-          <p:cNvPr id="4" name="텍스트"/>
+          <p:cNvPr id="34" name="텍스트"/>
           <p:cNvSpPr txBox="1"/>
           <p:nvPr/>
         </p:nvSpPr>
         <p:spPr>
           <a:xfrm>
-            <a:off x="2304000" y="684000"/>
-            <a:ext cx="720000" cy="432000"/>
+            <a:off x="216000" y="252000"/>
+            <a:ext cx="288000" cy="288000"/>
           </a:xfrm>
           <a:prstGeom prst="rect">
             <a:avLst/>
@@ -3463,11 +4293,11 @@
           <a:p>
             <a:pPr algn="ctr">
               <a:lnSpc>
-                <a:spcPts val="4350"/>
+                <a:spcPts val="2030"/>
               </a:lnSpc>
             </a:pPr>
             <a:r>
-              <a:rPr sz="3000" b="1">
+              <a:rPr sz="1400" b="1">
                 <a:solidFill>
                   <a:srgbClr val="FFFFFF"/>
                 </a:solidFill>
@@ -3481,14 +4311,14 @@
       </p:sp>
       <p:sp>
         <p:nvSpPr>
-          <p:cNvPr id="5" name="텍스트"/>
+          <p:cNvPr id="35" name="텍스트"/>
           <p:cNvSpPr txBox="1"/>
           <p:nvPr/>
         </p:nvSpPr>
         <p:spPr>
           <a:xfrm>
-            <a:off x="252000" y="540000"/>
-            <a:ext cx="1620000" cy="720000"/>
+            <a:off x="216000" y="1440000"/>
+            <a:ext cx="828000" cy="142876"/>
           </a:xfrm>
           <a:prstGeom prst="rect">
             <a:avLst/>
@@ -3503,49 +4333,215 @@
           <a:p>
             <a:pPr algn="l">
               <a:lnSpc>
-                <a:spcPts val="1739"/>
+                <a:spcPts val="1087"/>
               </a:lnSpc>
             </a:pPr>
             <a:r>
-              <a:rPr sz="1200" b="1">
+              <a:rPr sz="750" b="1" spc="100">
+                <a:solidFill>
+                  <a:srgbClr val="FFFFFF"/>
+                </a:solidFill>
+                <a:latin typeface="맑은 고딕"/>
+                <a:ea typeface="맑은 고딕"/>
+              </a:rPr>
+              <a:t>상담 분야</a:t>
+            </a:r>
+          </a:p>
+        </p:txBody>
+      </p:sp>
+      <p:sp>
+        <p:nvSpPr>
+          <p:cNvPr id="36" name="텍스트"/>
+          <p:cNvSpPr txBox="1"/>
+          <p:nvPr/>
+        </p:nvSpPr>
+        <p:spPr>
+          <a:xfrm>
+            <a:off x="1440000" y="223200"/>
+            <a:ext cx="1080000" cy="99061"/>
+          </a:xfrm>
+          <a:prstGeom prst="rect">
+            <a:avLst/>
+          </a:prstGeom>
+          <a:noFill/>
+        </p:spPr>
+        <p:txBody>
+          <a:bodyPr wrap="square" lIns="0" rIns="0" tIns="0" bIns="0" anchor="t">
+            <a:spAutoFit/>
+          </a:bodyPr>
+          <a:lstStyle/>
+          <a:p>
+            <a:pPr algn="l">
+              <a:lnSpc>
+                <a:spcPts val="754"/>
+              </a:lnSpc>
+            </a:pPr>
+            <a:r>
+              <a:rPr sz="520" b="1" spc="240">
+                <a:solidFill>
+                  <a:srgbClr val="6B7280"/>
+                </a:solidFill>
+                <a:latin typeface="맑은 고딕"/>
+                <a:ea typeface="맑은 고딕"/>
+              </a:rPr>
+              <a:t>상담 분야</a:t>
+            </a:r>
+          </a:p>
+        </p:txBody>
+      </p:sp>
+      <p:cxnSp>
+        <p:nvCxnSpPr>
+          <p:cNvPr id="37" name="Connector 36"/>
+          <p:cNvCxnSpPr/>
+          <p:nvPr/>
+        </p:nvCxnSpPr>
+        <p:spPr>
+          <a:xfrm>
+            <a:off x="1440000" y="360000"/>
+            <a:ext cx="1548000" cy="0"/>
+          </a:xfrm>
+          <a:prstGeom prst="line">
+            <a:avLst/>
+          </a:prstGeom>
+          <a:ln w="3600">
+            <a:solidFill>
+              <a:srgbClr val="E3E5E9"/>
+            </a:solidFill>
+          </a:ln>
+        </p:spPr>
+      </p:cxnSp>
+      <p:sp>
+        <p:nvSpPr>
+          <p:cNvPr id="38" name="텍스트"/>
+          <p:cNvSpPr txBox="1"/>
+          <p:nvPr/>
+        </p:nvSpPr>
+        <p:spPr>
+          <a:xfrm>
+            <a:off x="1440000" y="403200"/>
+            <a:ext cx="1296000" cy="133351"/>
+          </a:xfrm>
+          <a:prstGeom prst="rect">
+            <a:avLst/>
+          </a:prstGeom>
+          <a:noFill/>
+        </p:spPr>
+        <p:txBody>
+          <a:bodyPr wrap="square" lIns="0" rIns="0" tIns="0" bIns="0" anchor="t">
+            <a:spAutoFit/>
+          </a:bodyPr>
+          <a:lstStyle/>
+          <a:p>
+            <a:pPr algn="l">
+              <a:lnSpc>
+                <a:spcPts val="1015"/>
+              </a:lnSpc>
+            </a:pPr>
+            <a:r>
+              <a:rPr sz="700" b="0">
                 <a:solidFill>
                   <a:srgbClr val="12151C"/>
                 </a:solidFill>
                 <a:latin typeface="맑은 고딕"/>
                 <a:ea typeface="맑은 고딕"/>
               </a:rPr>
-              <a:t>필요한 시점에</a:t>
-            </a:r>
-          </a:p>
+              <a:t>보험 상담</a:t>
+            </a:r>
+          </a:p>
+        </p:txBody>
+      </p:sp>
+      <p:cxnSp>
+        <p:nvCxnSpPr>
+          <p:cNvPr id="39" name="Connector 38"/>
+          <p:cNvCxnSpPr/>
+          <p:nvPr/>
+        </p:nvCxnSpPr>
+        <p:spPr>
+          <a:xfrm>
+            <a:off x="1440000" y="561600"/>
+            <a:ext cx="1548000" cy="0"/>
+          </a:xfrm>
+          <a:prstGeom prst="line">
+            <a:avLst/>
+          </a:prstGeom>
+          <a:ln w="3600">
+            <a:solidFill>
+              <a:srgbClr val="E3E5E9"/>
+            </a:solidFill>
+          </a:ln>
+        </p:spPr>
+      </p:cxnSp>
+      <p:sp>
+        <p:nvSpPr>
+          <p:cNvPr id="40" name="텍스트"/>
+          <p:cNvSpPr txBox="1"/>
+          <p:nvPr/>
+        </p:nvSpPr>
+        <p:spPr>
+          <a:xfrm>
+            <a:off x="1440000" y="604800"/>
+            <a:ext cx="1296000" cy="133351"/>
+          </a:xfrm>
+          <a:prstGeom prst="rect">
+            <a:avLst/>
+          </a:prstGeom>
+          <a:noFill/>
+        </p:spPr>
+        <p:txBody>
+          <a:bodyPr wrap="square" lIns="0" rIns="0" tIns="0" bIns="0" anchor="t">
+            <a:spAutoFit/>
+          </a:bodyPr>
+          <a:lstStyle/>
           <a:p>
             <a:pPr algn="l">
               <a:lnSpc>
-                <a:spcPts val="1739"/>
+                <a:spcPts val="1015"/>
               </a:lnSpc>
             </a:pPr>
             <a:r>
-              <a:rPr sz="1200" b="1">
+              <a:rPr sz="700" b="0">
                 <a:solidFill>
                   <a:srgbClr val="12151C"/>
                 </a:solidFill>
                 <a:latin typeface="맑은 고딕"/>
                 <a:ea typeface="맑은 고딕"/>
               </a:rPr>
-              <a:t>먼저 연락드립니다</a:t>
-            </a:r>
-          </a:p>
-        </p:txBody>
-      </p:sp>
-      <p:sp>
-        <p:nvSpPr>
-          <p:cNvPr id="6" name="텍스트"/>
+              <a:t>투자 상담</a:t>
+            </a:r>
+          </a:p>
+        </p:txBody>
+      </p:sp>
+      <p:cxnSp>
+        <p:nvCxnSpPr>
+          <p:cNvPr id="41" name="Connector 40"/>
+          <p:cNvCxnSpPr/>
+          <p:nvPr/>
+        </p:nvCxnSpPr>
+        <p:spPr>
+          <a:xfrm>
+            <a:off x="1440000" y="763200"/>
+            <a:ext cx="1548000" cy="0"/>
+          </a:xfrm>
+          <a:prstGeom prst="line">
+            <a:avLst/>
+          </a:prstGeom>
+          <a:ln w="3600">
+            <a:solidFill>
+              <a:srgbClr val="E3E5E9"/>
+            </a:solidFill>
+          </a:ln>
+        </p:spPr>
+      </p:cxnSp>
+      <p:sp>
+        <p:nvSpPr>
+          <p:cNvPr id="42" name="텍스트"/>
           <p:cNvSpPr txBox="1"/>
           <p:nvPr/>
         </p:nvSpPr>
         <p:spPr>
           <a:xfrm>
-            <a:off x="252000" y="1512000"/>
-            <a:ext cx="1584000" cy="123826"/>
+            <a:off x="1440000" y="806400"/>
+            <a:ext cx="1296000" cy="133351"/>
           </a:xfrm>
           <a:prstGeom prst="rect">
             <a:avLst/>
@@ -3560,18 +4556,140 @@
           <a:p>
             <a:pPr algn="l">
               <a:lnSpc>
-                <a:spcPts val="942"/>
+                <a:spcPts val="1015"/>
               </a:lnSpc>
             </a:pPr>
             <a:r>
-              <a:rPr sz="650" b="1" spc="200">
+              <a:rPr sz="700" b="0">
+                <a:solidFill>
+                  <a:srgbClr val="12151C"/>
+                </a:solidFill>
+                <a:latin typeface="맑은 고딕"/>
+                <a:ea typeface="맑은 고딕"/>
+              </a:rPr>
+              <a:t>상속 · 증여</a:t>
+            </a:r>
+          </a:p>
+        </p:txBody>
+      </p:sp>
+      <p:cxnSp>
+        <p:nvCxnSpPr>
+          <p:cNvPr id="43" name="Connector 42"/>
+          <p:cNvCxnSpPr/>
+          <p:nvPr/>
+        </p:nvCxnSpPr>
+        <p:spPr>
+          <a:xfrm>
+            <a:off x="1440000" y="964800"/>
+            <a:ext cx="1548000" cy="0"/>
+          </a:xfrm>
+          <a:prstGeom prst="line">
+            <a:avLst/>
+          </a:prstGeom>
+          <a:ln w="3600">
+            <a:solidFill>
+              <a:srgbClr val="E3E5E9"/>
+            </a:solidFill>
+          </a:ln>
+        </p:spPr>
+      </p:cxnSp>
+      <p:sp>
+        <p:nvSpPr>
+          <p:cNvPr id="44" name="텍스트"/>
+          <p:cNvSpPr txBox="1"/>
+          <p:nvPr/>
+        </p:nvSpPr>
+        <p:spPr>
+          <a:xfrm>
+            <a:off x="1440000" y="1008000"/>
+            <a:ext cx="1296000" cy="133351"/>
+          </a:xfrm>
+          <a:prstGeom prst="rect">
+            <a:avLst/>
+          </a:prstGeom>
+          <a:noFill/>
+        </p:spPr>
+        <p:txBody>
+          <a:bodyPr wrap="square" lIns="0" rIns="0" tIns="0" bIns="0" anchor="t">
+            <a:spAutoFit/>
+          </a:bodyPr>
+          <a:lstStyle/>
+          <a:p>
+            <a:pPr algn="l">
+              <a:lnSpc>
+                <a:spcPts val="1015"/>
+              </a:lnSpc>
+            </a:pPr>
+            <a:r>
+              <a:rPr sz="700" b="0">
+                <a:solidFill>
+                  <a:srgbClr val="12151C"/>
+                </a:solidFill>
+                <a:latin typeface="맑은 고딕"/>
+                <a:ea typeface="맑은 고딕"/>
+              </a:rPr>
+              <a:t>사업자 상담</a:t>
+            </a:r>
+          </a:p>
+        </p:txBody>
+      </p:sp>
+      <p:cxnSp>
+        <p:nvCxnSpPr>
+          <p:cNvPr id="45" name="Connector 44"/>
+          <p:cNvCxnSpPr/>
+          <p:nvPr/>
+        </p:nvCxnSpPr>
+        <p:spPr>
+          <a:xfrm>
+            <a:off x="1440000" y="1166400"/>
+            <a:ext cx="1548000" cy="0"/>
+          </a:xfrm>
+          <a:prstGeom prst="line">
+            <a:avLst/>
+          </a:prstGeom>
+          <a:ln w="3600">
+            <a:solidFill>
+              <a:srgbClr val="E3E5E9"/>
+            </a:solidFill>
+          </a:ln>
+        </p:spPr>
+      </p:cxnSp>
+      <p:sp>
+        <p:nvSpPr>
+          <p:cNvPr id="46" name="텍스트"/>
+          <p:cNvSpPr txBox="1"/>
+          <p:nvPr/>
+        </p:nvSpPr>
+        <p:spPr>
+          <a:xfrm>
+            <a:off x="1440000" y="1569600"/>
+            <a:ext cx="1548000" cy="114301"/>
+          </a:xfrm>
+          <a:prstGeom prst="rect">
+            <a:avLst/>
+          </a:prstGeom>
+          <a:noFill/>
+        </p:spPr>
+        <p:txBody>
+          <a:bodyPr wrap="square" lIns="0" rIns="0" tIns="0" bIns="0" anchor="t">
+            <a:spAutoFit/>
+          </a:bodyPr>
+          <a:lstStyle/>
+          <a:p>
+            <a:pPr algn="l">
+              <a:lnSpc>
+                <a:spcPts val="869"/>
+              </a:lnSpc>
+            </a:pPr>
+            <a:r>
+              <a:rPr sz="600" b="0">
                 <a:solidFill>
                   <a:srgbClr val="6B7280"/>
                 </a:solidFill>
                 <a:latin typeface="맑은 고딕"/>
                 <a:ea typeface="맑은 고딕"/>
               </a:rPr>
-              <a:t>회사 · 사무소 이름</a:t>
+              <a:t>방문 · 전화 상담   |   @채널아이디</a:t>
             </a:r>
           </a:p>
         </p:txBody>
